--- a/corpus/pptx/notes-speaker.pptx
+++ b/corpus/pptx/notes-speaker.pptx
@@ -64,7 +64,7 @@
 </file>
 
 <file path=ppt/notesSlides/notesSlide1.xml><?xml version="1.0" encoding="utf-8"?>
-<p:notesSlide xmlns:a="http://schemas.openxmlformats.org/drawingml/2006/main" xmlns:r="http://schemas.openxmlformats.org/officeDocument/2006/relationships" xmlns:p="http://schemas.openxmlformats.org/presentationml/2006/main">
+<p:notes xmlns:a="http://schemas.openxmlformats.org/drawingml/2006/main" xmlns:r="http://schemas.openxmlformats.org/officeDocument/2006/relationships" xmlns:p="http://schemas.openxmlformats.org/presentationml/2006/main">
   <p:cSld>
     <p:spTree>
       <p:nvGrpSpPr>
@@ -126,11 +126,11 @@
       </p:sp>
     </p:spTree>
   </p:cSld>
-</p:notesSlide>
+</p:notes>
 </file>
 
 <file path=ppt/notesSlides/notesSlide2.xml><?xml version="1.0" encoding="utf-8"?>
-<p:notesSlide xmlns:a="http://schemas.openxmlformats.org/drawingml/2006/main" xmlns:r="http://schemas.openxmlformats.org/officeDocument/2006/relationships" xmlns:p="http://schemas.openxmlformats.org/presentationml/2006/main">
+<p:notes xmlns:a="http://schemas.openxmlformats.org/drawingml/2006/main" xmlns:r="http://schemas.openxmlformats.org/officeDocument/2006/relationships" xmlns:p="http://schemas.openxmlformats.org/presentationml/2006/main">
   <p:cSld>
     <p:spTree>
       <p:nvGrpSpPr>
@@ -186,7 +186,7 @@
       </p:sp>
     </p:spTree>
   </p:cSld>
-</p:notesSlide>
+</p:notes>
 </file>
 
 <file path=ppt/slideLayouts/slideLayout1.xml><?xml version="1.0" encoding="utf-8"?>

--- a/corpus/pptx/notes-speaker.pptx
+++ b/corpus/pptx/notes-speaker.pptx
@@ -191,7 +191,7 @@
 
 <file path=ppt/slideLayouts/slideLayout1.xml><?xml version="1.0" encoding="utf-8"?>
 <p:sldLayout xmlns:a="http://schemas.openxmlformats.org/drawingml/2006/main" xmlns:r="http://schemas.openxmlformats.org/officeDocument/2006/relationships" xmlns:p="http://schemas.openxmlformats.org/presentationml/2006/main" type="obj" preserve="1">
-  <p:cSld>
+  <p:cSld name="Titulo y objetos">
     <p:spTree>
       <p:nvGrpSpPr>
         <p:cNvPr id="1" name=""/>
